--- a/(3.4) 유니티 설치, 뷰, 오브젝트.pptx
+++ b/(3.4) 유니티 설치, 뷰, 오브젝트.pptx
@@ -129,7 +129,7 @@
   <pc:docChgLst>
     <pc:chgData name="musukie52@gmail.com" userId="017bd91f96aa8751" providerId="LiveId" clId="{5B2C3894-F97E-4CAB-8812-5BB4D83AAC6A}"/>
     <pc:docChg chg="undo custSel addSld delSld modSld">
-      <pc:chgData name="musukie52@gmail.com" userId="017bd91f96aa8751" providerId="LiveId" clId="{5B2C3894-F97E-4CAB-8812-5BB4D83AAC6A}" dt="2026-03-04T06:40:13.322" v="1915" actId="20577"/>
+      <pc:chgData name="musukie52@gmail.com" userId="017bd91f96aa8751" providerId="LiveId" clId="{5B2C3894-F97E-4CAB-8812-5BB4D83AAC6A}" dt="2026-03-05T05:10:09.545" v="1976" actId="6549"/>
       <pc:docMkLst>
         <pc:docMk/>
       </pc:docMkLst>
@@ -187,7 +187,7 @@
         </pc:spChg>
       </pc:sldChg>
       <pc:sldChg chg="modSp new mod">
-        <pc:chgData name="musukie52@gmail.com" userId="017bd91f96aa8751" providerId="LiveId" clId="{5B2C3894-F97E-4CAB-8812-5BB4D83AAC6A}" dt="2026-03-04T06:39:27.444" v="1774" actId="20577"/>
+        <pc:chgData name="musukie52@gmail.com" userId="017bd91f96aa8751" providerId="LiveId" clId="{5B2C3894-F97E-4CAB-8812-5BB4D83AAC6A}" dt="2026-03-05T05:10:09.545" v="1976" actId="6549"/>
         <pc:sldMkLst>
           <pc:docMk/>
           <pc:sldMk cId="224790040" sldId="259"/>
@@ -201,7 +201,7 @@
           </ac:spMkLst>
         </pc:spChg>
         <pc:spChg chg="mod">
-          <ac:chgData name="musukie52@gmail.com" userId="017bd91f96aa8751" providerId="LiveId" clId="{5B2C3894-F97E-4CAB-8812-5BB4D83AAC6A}" dt="2026-03-04T06:39:27.444" v="1774" actId="20577"/>
+          <ac:chgData name="musukie52@gmail.com" userId="017bd91f96aa8751" providerId="LiveId" clId="{5B2C3894-F97E-4CAB-8812-5BB4D83AAC6A}" dt="2026-03-05T05:10:09.545" v="1976" actId="6549"/>
           <ac:spMkLst>
             <pc:docMk/>
             <pc:sldMk cId="224790040" sldId="259"/>
@@ -384,7 +384,7 @@
           <a:p>
             <a:fld id="{808C59F4-15AE-49DE-BD37-FE0191C33B9E}" type="datetimeFigureOut">
               <a:rPr lang="ko-KR" altLang="en-US" smtClean="0"/>
-              <a:t>2026-03-04</a:t>
+              <a:t>2026-03-05</a:t>
             </a:fld>
             <a:endParaRPr lang="ko-KR" altLang="en-US"/>
           </a:p>
@@ -582,7 +582,7 @@
           <a:p>
             <a:fld id="{808C59F4-15AE-49DE-BD37-FE0191C33B9E}" type="datetimeFigureOut">
               <a:rPr lang="ko-KR" altLang="en-US" smtClean="0"/>
-              <a:t>2026-03-04</a:t>
+              <a:t>2026-03-05</a:t>
             </a:fld>
             <a:endParaRPr lang="ko-KR" altLang="en-US"/>
           </a:p>
@@ -790,7 +790,7 @@
           <a:p>
             <a:fld id="{808C59F4-15AE-49DE-BD37-FE0191C33B9E}" type="datetimeFigureOut">
               <a:rPr lang="ko-KR" altLang="en-US" smtClean="0"/>
-              <a:t>2026-03-04</a:t>
+              <a:t>2026-03-05</a:t>
             </a:fld>
             <a:endParaRPr lang="ko-KR" altLang="en-US"/>
           </a:p>
@@ -988,7 +988,7 @@
           <a:p>
             <a:fld id="{808C59F4-15AE-49DE-BD37-FE0191C33B9E}" type="datetimeFigureOut">
               <a:rPr lang="ko-KR" altLang="en-US" smtClean="0"/>
-              <a:t>2026-03-04</a:t>
+              <a:t>2026-03-05</a:t>
             </a:fld>
             <a:endParaRPr lang="ko-KR" altLang="en-US"/>
           </a:p>
@@ -1263,7 +1263,7 @@
           <a:p>
             <a:fld id="{808C59F4-15AE-49DE-BD37-FE0191C33B9E}" type="datetimeFigureOut">
               <a:rPr lang="ko-KR" altLang="en-US" smtClean="0"/>
-              <a:t>2026-03-04</a:t>
+              <a:t>2026-03-05</a:t>
             </a:fld>
             <a:endParaRPr lang="ko-KR" altLang="en-US"/>
           </a:p>
@@ -1528,7 +1528,7 @@
           <a:p>
             <a:fld id="{808C59F4-15AE-49DE-BD37-FE0191C33B9E}" type="datetimeFigureOut">
               <a:rPr lang="ko-KR" altLang="en-US" smtClean="0"/>
-              <a:t>2026-03-04</a:t>
+              <a:t>2026-03-05</a:t>
             </a:fld>
             <a:endParaRPr lang="ko-KR" altLang="en-US"/>
           </a:p>
@@ -1940,7 +1940,7 @@
           <a:p>
             <a:fld id="{808C59F4-15AE-49DE-BD37-FE0191C33B9E}" type="datetimeFigureOut">
               <a:rPr lang="ko-KR" altLang="en-US" smtClean="0"/>
-              <a:t>2026-03-04</a:t>
+              <a:t>2026-03-05</a:t>
             </a:fld>
             <a:endParaRPr lang="ko-KR" altLang="en-US"/>
           </a:p>
@@ -2081,7 +2081,7 @@
           <a:p>
             <a:fld id="{808C59F4-15AE-49DE-BD37-FE0191C33B9E}" type="datetimeFigureOut">
               <a:rPr lang="ko-KR" altLang="en-US" smtClean="0"/>
-              <a:t>2026-03-04</a:t>
+              <a:t>2026-03-05</a:t>
             </a:fld>
             <a:endParaRPr lang="ko-KR" altLang="en-US"/>
           </a:p>
@@ -2194,7 +2194,7 @@
           <a:p>
             <a:fld id="{808C59F4-15AE-49DE-BD37-FE0191C33B9E}" type="datetimeFigureOut">
               <a:rPr lang="ko-KR" altLang="en-US" smtClean="0"/>
-              <a:t>2026-03-04</a:t>
+              <a:t>2026-03-05</a:t>
             </a:fld>
             <a:endParaRPr lang="ko-KR" altLang="en-US"/>
           </a:p>
@@ -2505,7 +2505,7 @@
           <a:p>
             <a:fld id="{808C59F4-15AE-49DE-BD37-FE0191C33B9E}" type="datetimeFigureOut">
               <a:rPr lang="ko-KR" altLang="en-US" smtClean="0"/>
-              <a:t>2026-03-04</a:t>
+              <a:t>2026-03-05</a:t>
             </a:fld>
             <a:endParaRPr lang="ko-KR" altLang="en-US"/>
           </a:p>
@@ -2793,7 +2793,7 @@
           <a:p>
             <a:fld id="{808C59F4-15AE-49DE-BD37-FE0191C33B9E}" type="datetimeFigureOut">
               <a:rPr lang="ko-KR" altLang="en-US" smtClean="0"/>
-              <a:t>2026-03-04</a:t>
+              <a:t>2026-03-05</a:t>
             </a:fld>
             <a:endParaRPr lang="ko-KR" altLang="en-US"/>
           </a:p>
@@ -3034,7 +3034,7 @@
           <a:p>
             <a:fld id="{808C59F4-15AE-49DE-BD37-FE0191C33B9E}" type="datetimeFigureOut">
               <a:rPr lang="ko-KR" altLang="en-US" smtClean="0"/>
-              <a:t>2026-03-04</a:t>
+              <a:t>2026-03-05</a:t>
             </a:fld>
             <a:endParaRPr lang="ko-KR" altLang="en-US"/>
           </a:p>
@@ -3998,10 +3998,18 @@
             </a:r>
             <a:r>
               <a:rPr lang="ko-KR" altLang="en-US" dirty="0"/>
-              <a:t>이동 툴과 회전 툴 활성화</a:t>
+              <a:t>이동 툴과 회전 툴</a:t>
             </a:r>
             <a:r>
               <a:rPr lang="en-US" altLang="ko-KR" dirty="0"/>
+              <a:t>, </a:t>
+            </a:r>
+            <a:r>
+              <a:rPr lang="ko-KR" altLang="en-US" dirty="0"/>
+              <a:t>스케일 툴을 한꺼번에 할 수 있다</a:t>
+            </a:r>
+            <a:r>
+              <a:rPr lang="en-US" altLang="ko-KR"/>
               <a:t>. </a:t>
             </a:r>
             <a:r>
@@ -4088,7 +4096,9 @@
         </p:nvSpPr>
         <p:spPr/>
         <p:txBody>
-          <a:bodyPr/>
+          <a:bodyPr>
+            <a:normAutofit fontScale="92500" lnSpcReduction="20000"/>
+          </a:bodyPr>
           <a:lstStyle/>
           <a:p>
             <a:r>
@@ -4193,6 +4203,31 @@
           </a:p>
           <a:p>
             <a:r>
+              <a:rPr lang="en-US" altLang="ko-KR" dirty="0"/>
+              <a:t>Ctrl + Z : </a:t>
+            </a:r>
+            <a:r>
+              <a:rPr lang="ko-KR" altLang="en-US" dirty="0"/>
+              <a:t>이전으로 돌아가기</a:t>
+            </a:r>
+            <a:endParaRPr lang="en-US" altLang="ko-KR" dirty="0"/>
+          </a:p>
+          <a:p>
+            <a:r>
+              <a:rPr lang="en-US" altLang="ko-KR" dirty="0"/>
+              <a:t>Ctrl + Y : </a:t>
+            </a:r>
+            <a:r>
+              <a:rPr lang="ko-KR" altLang="en-US"/>
+              <a:t>앞으로 다시 돌아가기</a:t>
+            </a:r>
+            <a:endParaRPr lang="en-US" altLang="ko-KR" dirty="0"/>
+          </a:p>
+          <a:p>
+            <a:endParaRPr lang="en-US" altLang="ko-KR" dirty="0"/>
+          </a:p>
+          <a:p>
+            <a:r>
               <a:rPr lang="ko-KR" altLang="en-US" dirty="0"/>
               <a:t>같은 속성을 가진 오브젝트끼리 모아서 상위 오브젝트로 </a:t>
             </a:r>
@@ -4205,7 +4240,7 @@
               <a:t> 형태로 관리</a:t>
             </a:r>
             <a:r>
-              <a:rPr lang="en-US" altLang="ko-KR"/>
+              <a:rPr lang="en-US" altLang="ko-KR" dirty="0"/>
               <a:t>.</a:t>
             </a:r>
             <a:endParaRPr lang="ko-KR" altLang="en-US" dirty="0"/>
